--- a/classes/parte-4-seguridad-de-aplicaciones-web/102-gestion-de-sesiones-y-ataques-asociados/clase-102-presentacion.pptx
+++ b/classes/parte-4-seguridad-de-aplicaciones-web/102-gestion-de-sesiones-y-ataques-asociados/clase-102-presentacion.pptx
@@ -17,6 +17,9 @@
     <p:sldId id="265" r:id="rId16"/>
     <p:sldId id="266" r:id="rId17"/>
     <p:sldId id="267" r:id="rId18"/>
+    <p:sldId id="268" r:id="rId19"/>
+    <p:sldId id="269" r:id="rId20"/>
+    <p:sldId id="270" r:id="rId21"/>
   </p:sldIdLst>
   <p:sldSz cx="9144000" cy="6858000" type="screen4x3"/>
   <p:notesSz cx="6858000" cy="9144000"/>
@@ -3198,7 +3201,7 @@
                   <a:srgbClr val="0B3D2E"/>
                 </a:solidFill>
               </a:rPr>
-              <a:t>⚠️ Errores comunes</a:t>
+              <a:t>✍️ Ejercicios</a:t>
             </a:r>
           </a:p>
         </p:txBody>
@@ -3236,67 +3239,82 @@
                   <a:srgbClr val="22282E"/>
                 </a:solidFill>
               </a:rPr>
-              <a:t>•  Token cambia tras login — Rotación correcta; no hay fixation</a:t>
-            </a:r>
-          </a:p>
-          <a:p>
-            <a:pPr>
-              <a:spcAft>
-                <a:spcPts val="600"/>
-              </a:spcAft>
-            </a:pPr>
-            <a:r>
-              <a:rPr sz="1500">
-                <a:solidFill>
-                  <a:srgbClr val="22282E"/>
-                </a:solidFill>
-              </a:rPr>
-              <a:t>•  Sequencer dice "buena" entropía — Token robusto; busca otro vector</a:t>
-            </a:r>
-          </a:p>
-          <a:p>
-            <a:pPr>
-              <a:spcAft>
-                <a:spcPts val="600"/>
-              </a:spcAft>
-            </a:pPr>
-            <a:r>
-              <a:rPr sz="1500">
-                <a:solidFill>
-                  <a:srgbClr val="22282E"/>
-                </a:solidFill>
-              </a:rPr>
-              <a:t>•  Cookie sin HttpOnly — Riesgo de robo vía XSS; repórtalo</a:t>
-            </a:r>
-          </a:p>
-          <a:p>
-            <a:pPr>
-              <a:spcAft>
-                <a:spcPts val="600"/>
-              </a:spcAft>
-            </a:pPr>
-            <a:r>
-              <a:rPr sz="1500">
-                <a:solidFill>
-                  <a:srgbClr val="22282E"/>
-                </a:solidFill>
-              </a:rPr>
-              <a:t>•  Logout no invalida — El token sigue vivo; fallo real</a:t>
-            </a:r>
-          </a:p>
-          <a:p>
-            <a:pPr>
-              <a:spcAft>
-                <a:spcPts val="600"/>
-              </a:spcAft>
-            </a:pPr>
-            <a:r>
-              <a:rPr sz="1500">
-                <a:solidFill>
-                  <a:srgbClr val="22282E"/>
-                </a:solidFill>
-              </a:rPr>
-              <a:t>•  SameSite ausente — Riesgo de CSRF; combínalo con la clase 098</a:t>
+              <a:t>•  Evalúa la entropía de un token con Sequencer y explica el resultado.</a:t>
+            </a:r>
+          </a:p>
+          <a:p>
+            <a:pPr>
+              <a:spcAft>
+                <a:spcPts val="600"/>
+              </a:spcAft>
+            </a:pPr>
+            <a:r>
+              <a:rPr sz="1500">
+                <a:solidFill>
+                  <a:srgbClr val="22282E"/>
+                </a:solidFill>
+              </a:rPr>
+              <a:t>•  Reproduce una session fixation en un lab que no rote el ID.</a:t>
+            </a:r>
+          </a:p>
+          <a:p>
+            <a:pPr>
+              <a:spcAft>
+                <a:spcPts val="600"/>
+              </a:spcAft>
+            </a:pPr>
+            <a:r>
+              <a:rPr sz="1500">
+                <a:solidFill>
+                  <a:srgbClr val="22282E"/>
+                </a:solidFill>
+              </a:rPr>
+              <a:t>•  Enumera los atributos de cookie y qué protege cada uno.</a:t>
+            </a:r>
+          </a:p>
+          <a:p>
+            <a:pPr>
+              <a:spcAft>
+                <a:spcPts val="600"/>
+              </a:spcAft>
+            </a:pPr>
+            <a:r>
+              <a:rPr sz="1500">
+                <a:solidFill>
+                  <a:srgbClr val="22282E"/>
+                </a:solidFill>
+              </a:rPr>
+              <a:t>•  Comprueba si la sesión expira por inactividad y por tiempo absoluto.</a:t>
+            </a:r>
+          </a:p>
+          <a:p>
+            <a:pPr>
+              <a:spcAft>
+                <a:spcPts val="600"/>
+              </a:spcAft>
+            </a:pPr>
+            <a:r>
+              <a:rPr sz="1500">
+                <a:solidFill>
+                  <a:srgbClr val="22282E"/>
+                </a:solidFill>
+              </a:rPr>
+              <a:t>•  Explica por qué el logout debe invalidar en servidor, no solo borrar la cookie.</a:t>
+            </a:r>
+          </a:p>
+          <a:p>
+            <a:pPr>
+              <a:spcAft>
+                <a:spcPts val="600"/>
+              </a:spcAft>
+            </a:pPr>
+            <a:r>
+              <a:rPr sz="1500">
+                <a:solidFill>
+                  <a:srgbClr val="22282E"/>
+                </a:solidFill>
+              </a:rPr>
+              <a:t>•  Diseña la configuración de cookie ideal para una app bancaria.</a:t>
             </a:r>
           </a:p>
         </p:txBody>
@@ -3347,7 +3365,7 @@
                   <a:srgbClr val="0B3D2E"/>
                 </a:solidFill>
               </a:rPr>
-              <a:t>❓ Preguntas frecuentes</a:t>
+              <a:t>📝 Reto verificable</a:t>
             </a:r>
           </a:p>
         </p:txBody>
@@ -3385,82 +3403,22 @@
                   <a:srgbClr val="22282E"/>
                 </a:solidFill>
               </a:rPr>
-              <a:t>•  ❓ ¿JWT elimina estos problemas?</a:t>
-            </a:r>
-          </a:p>
-          <a:p>
-            <a:pPr>
-              <a:spcAft>
-                <a:spcPts val="600"/>
-              </a:spcAft>
-            </a:pPr>
-            <a:r>
-              <a:rPr sz="1500">
-                <a:solidFill>
-                  <a:srgbClr val="22282E"/>
-                </a:solidFill>
-              </a:rPr>
-              <a:t>•  No; introduce otros (revocación, expiración) que veremos en la clase 103. Los stateless tienen sus propios retos.</a:t>
-            </a:r>
-          </a:p>
-          <a:p>
-            <a:pPr>
-              <a:spcAft>
-                <a:spcPts val="600"/>
-              </a:spcAft>
-            </a:pPr>
-            <a:r>
-              <a:rPr sz="1500">
-                <a:solidFill>
-                  <a:srgbClr val="22282E"/>
-                </a:solidFill>
-              </a:rPr>
-              <a:t>•  ❓ ¿Basta con HttpOnly para proteger la sesión?</a:t>
-            </a:r>
-          </a:p>
-          <a:p>
-            <a:pPr>
-              <a:spcAft>
-                <a:spcPts val="600"/>
-              </a:spcAft>
-            </a:pPr>
-            <a:r>
-              <a:rPr sz="1500">
-                <a:solidFill>
-                  <a:srgbClr val="22282E"/>
-                </a:solidFill>
-              </a:rPr>
-              <a:t>•  Ayuda contra el robo vía XSS, pero necesitas Secure, SameSite, rotación y expiración correcta.</a:t>
-            </a:r>
-          </a:p>
-          <a:p>
-            <a:pPr>
-              <a:spcAft>
-                <a:spcPts val="600"/>
-              </a:spcAft>
-            </a:pPr>
-            <a:r>
-              <a:rPr sz="1500">
-                <a:solidFill>
-                  <a:srgbClr val="22282E"/>
-                </a:solidFill>
-              </a:rPr>
-              <a:t>•  ❓ ¿Por qué rotar el ID tras el login?</a:t>
-            </a:r>
-          </a:p>
-          <a:p>
-            <a:pPr>
-              <a:spcAft>
-                <a:spcPts val="600"/>
-              </a:spcAft>
-            </a:pPr>
-            <a:r>
-              <a:rPr sz="1500">
-                <a:solidFill>
-                  <a:srgbClr val="22282E"/>
-                </a:solidFill>
-              </a:rPr>
-              <a:t>•  Para invalidar cualquier ID que el atacante pudiera haber fijado antes de la autenticación.</a:t>
+              <a:t>•  Demuestra un fallo de gestión de sesión en un lab: session fixation o token válido tras logout, y propón la corrección.</a:t>
+            </a:r>
+          </a:p>
+          <a:p>
+            <a:pPr>
+              <a:spcAft>
+                <a:spcPts val="600"/>
+              </a:spcAft>
+            </a:pPr>
+            <a:r>
+              <a:rPr sz="1500">
+                <a:solidFill>
+                  <a:srgbClr val="22282E"/>
+                </a:solidFill>
+              </a:rPr>
+              <a:t>•  Criterio de aceptación: reproduces el fallo con evidencia (mismo token antes/después o reuso tras logout) y describes la defensa concreta (rotación en login, invalidación en servidor).</a:t>
             </a:r>
           </a:p>
         </p:txBody>
@@ -3511,7 +3469,7 @@
                   <a:srgbClr val="0B3D2E"/>
                 </a:solidFill>
               </a:rPr>
-              <a:t>🔗 Referencias</a:t>
+              <a:t>⚠️ Errores comunes</a:t>
             </a:r>
           </a:p>
         </p:txBody>
@@ -3549,6 +3507,319 @@
                   <a:srgbClr val="22282E"/>
                 </a:solidFill>
               </a:rPr>
+              <a:t>•  Token cambia tras login — Rotación correcta; no hay fixation</a:t>
+            </a:r>
+          </a:p>
+          <a:p>
+            <a:pPr>
+              <a:spcAft>
+                <a:spcPts val="600"/>
+              </a:spcAft>
+            </a:pPr>
+            <a:r>
+              <a:rPr sz="1500">
+                <a:solidFill>
+                  <a:srgbClr val="22282E"/>
+                </a:solidFill>
+              </a:rPr>
+              <a:t>•  Sequencer dice "buena" entropía — Token robusto; busca otro vector</a:t>
+            </a:r>
+          </a:p>
+          <a:p>
+            <a:pPr>
+              <a:spcAft>
+                <a:spcPts val="600"/>
+              </a:spcAft>
+            </a:pPr>
+            <a:r>
+              <a:rPr sz="1500">
+                <a:solidFill>
+                  <a:srgbClr val="22282E"/>
+                </a:solidFill>
+              </a:rPr>
+              <a:t>•  Cookie sin HttpOnly — Riesgo de robo vía XSS; repórtalo</a:t>
+            </a:r>
+          </a:p>
+          <a:p>
+            <a:pPr>
+              <a:spcAft>
+                <a:spcPts val="600"/>
+              </a:spcAft>
+            </a:pPr>
+            <a:r>
+              <a:rPr sz="1500">
+                <a:solidFill>
+                  <a:srgbClr val="22282E"/>
+                </a:solidFill>
+              </a:rPr>
+              <a:t>•  Logout no invalida — El token sigue vivo; fallo real</a:t>
+            </a:r>
+          </a:p>
+          <a:p>
+            <a:pPr>
+              <a:spcAft>
+                <a:spcPts val="600"/>
+              </a:spcAft>
+            </a:pPr>
+            <a:r>
+              <a:rPr sz="1500">
+                <a:solidFill>
+                  <a:srgbClr val="22282E"/>
+                </a:solidFill>
+              </a:rPr>
+              <a:t>•  SameSite ausente — Riesgo de CSRF; combínalo con la clase 098</a:t>
+            </a:r>
+          </a:p>
+        </p:txBody>
+      </p:sp>
+    </p:spTree>
+  </p:cSld>
+  <p:clrMapOvr>
+    <a:masterClrMapping/>
+  </p:clrMapOvr>
+</p:sld>
+</file>
+
+<file path=ppt/slides/slide13.xml><?xml version="1.0" encoding="utf-8"?>
+<p:sld xmlns:a="http://schemas.openxmlformats.org/drawingml/2006/main" xmlns:p="http://schemas.openxmlformats.org/presentationml/2006/main" xmlns:r="http://schemas.openxmlformats.org/officeDocument/2006/relationships">
+  <p:cSld>
+    <p:spTree>
+      <p:nvGrpSpPr>
+        <p:cNvPr id="1" name=""/>
+        <p:cNvGrpSpPr/>
+        <p:nvPr/>
+      </p:nvGrpSpPr>
+      <p:grpSpPr/>
+      <p:sp>
+        <p:nvSpPr>
+          <p:cNvPr id="2" name="TextBox 1"/>
+          <p:cNvSpPr txBox="1"/>
+          <p:nvPr/>
+        </p:nvSpPr>
+        <p:spPr>
+          <a:xfrm>
+            <a:off x="457200" y="320040"/>
+            <a:ext cx="8229600" cy="822960"/>
+          </a:xfrm>
+          <a:prstGeom prst="rect">
+            <a:avLst/>
+          </a:prstGeom>
+          <a:noFill/>
+        </p:spPr>
+        <p:txBody>
+          <a:bodyPr wrap="square">
+            <a:spAutoFit/>
+          </a:bodyPr>
+          <a:lstStyle/>
+          <a:p>
+            <a:r>
+              <a:rPr sz="2600" b="1">
+                <a:solidFill>
+                  <a:srgbClr val="0B3D2E"/>
+                </a:solidFill>
+              </a:rPr>
+              <a:t>❓ Preguntas frecuentes</a:t>
+            </a:r>
+          </a:p>
+        </p:txBody>
+      </p:sp>
+      <p:sp>
+        <p:nvSpPr>
+          <p:cNvPr id="3" name="TextBox 2"/>
+          <p:cNvSpPr txBox="1"/>
+          <p:nvPr/>
+        </p:nvSpPr>
+        <p:spPr>
+          <a:xfrm>
+            <a:off x="457200" y="1280160"/>
+            <a:ext cx="8229600" cy="4937760"/>
+          </a:xfrm>
+          <a:prstGeom prst="rect">
+            <a:avLst/>
+          </a:prstGeom>
+          <a:noFill/>
+        </p:spPr>
+        <p:txBody>
+          <a:bodyPr wrap="square">
+            <a:spAutoFit/>
+          </a:bodyPr>
+          <a:lstStyle/>
+          <a:p>
+            <a:pPr>
+              <a:spcAft>
+                <a:spcPts val="600"/>
+              </a:spcAft>
+            </a:pPr>
+            <a:r>
+              <a:rPr sz="1500">
+                <a:solidFill>
+                  <a:srgbClr val="22282E"/>
+                </a:solidFill>
+              </a:rPr>
+              <a:t>•  ❓ ¿JWT elimina estos problemas?</a:t>
+            </a:r>
+          </a:p>
+          <a:p>
+            <a:pPr>
+              <a:spcAft>
+                <a:spcPts val="600"/>
+              </a:spcAft>
+            </a:pPr>
+            <a:r>
+              <a:rPr sz="1500">
+                <a:solidFill>
+                  <a:srgbClr val="22282E"/>
+                </a:solidFill>
+              </a:rPr>
+              <a:t>•  No; introduce otros (revocación, expiración) que veremos en la clase 103. Los stateless tienen sus propios retos.</a:t>
+            </a:r>
+          </a:p>
+          <a:p>
+            <a:pPr>
+              <a:spcAft>
+                <a:spcPts val="600"/>
+              </a:spcAft>
+            </a:pPr>
+            <a:r>
+              <a:rPr sz="1500">
+                <a:solidFill>
+                  <a:srgbClr val="22282E"/>
+                </a:solidFill>
+              </a:rPr>
+              <a:t>•  ❓ ¿Basta con HttpOnly para proteger la sesión?</a:t>
+            </a:r>
+          </a:p>
+          <a:p>
+            <a:pPr>
+              <a:spcAft>
+                <a:spcPts val="600"/>
+              </a:spcAft>
+            </a:pPr>
+            <a:r>
+              <a:rPr sz="1500">
+                <a:solidFill>
+                  <a:srgbClr val="22282E"/>
+                </a:solidFill>
+              </a:rPr>
+              <a:t>•  Ayuda contra el robo vía XSS, pero necesitas Secure, SameSite, rotación y expiración correcta.</a:t>
+            </a:r>
+          </a:p>
+          <a:p>
+            <a:pPr>
+              <a:spcAft>
+                <a:spcPts val="600"/>
+              </a:spcAft>
+            </a:pPr>
+            <a:r>
+              <a:rPr sz="1500">
+                <a:solidFill>
+                  <a:srgbClr val="22282E"/>
+                </a:solidFill>
+              </a:rPr>
+              <a:t>•  ❓ ¿Por qué rotar el ID tras el login?</a:t>
+            </a:r>
+          </a:p>
+          <a:p>
+            <a:pPr>
+              <a:spcAft>
+                <a:spcPts val="600"/>
+              </a:spcAft>
+            </a:pPr>
+            <a:r>
+              <a:rPr sz="1500">
+                <a:solidFill>
+                  <a:srgbClr val="22282E"/>
+                </a:solidFill>
+              </a:rPr>
+              <a:t>•  Para invalidar cualquier ID que el atacante pudiera haber fijado antes de la autenticación.</a:t>
+            </a:r>
+          </a:p>
+        </p:txBody>
+      </p:sp>
+    </p:spTree>
+  </p:cSld>
+  <p:clrMapOvr>
+    <a:masterClrMapping/>
+  </p:clrMapOvr>
+</p:sld>
+</file>
+
+<file path=ppt/slides/slide14.xml><?xml version="1.0" encoding="utf-8"?>
+<p:sld xmlns:a="http://schemas.openxmlformats.org/drawingml/2006/main" xmlns:p="http://schemas.openxmlformats.org/presentationml/2006/main" xmlns:r="http://schemas.openxmlformats.org/officeDocument/2006/relationships">
+  <p:cSld>
+    <p:spTree>
+      <p:nvGrpSpPr>
+        <p:cNvPr id="1" name=""/>
+        <p:cNvGrpSpPr/>
+        <p:nvPr/>
+      </p:nvGrpSpPr>
+      <p:grpSpPr/>
+      <p:sp>
+        <p:nvSpPr>
+          <p:cNvPr id="2" name="TextBox 1"/>
+          <p:cNvSpPr txBox="1"/>
+          <p:nvPr/>
+        </p:nvSpPr>
+        <p:spPr>
+          <a:xfrm>
+            <a:off x="457200" y="320040"/>
+            <a:ext cx="8229600" cy="822960"/>
+          </a:xfrm>
+          <a:prstGeom prst="rect">
+            <a:avLst/>
+          </a:prstGeom>
+          <a:noFill/>
+        </p:spPr>
+        <p:txBody>
+          <a:bodyPr wrap="square">
+            <a:spAutoFit/>
+          </a:bodyPr>
+          <a:lstStyle/>
+          <a:p>
+            <a:r>
+              <a:rPr sz="2600" b="1">
+                <a:solidFill>
+                  <a:srgbClr val="0B3D2E"/>
+                </a:solidFill>
+              </a:rPr>
+              <a:t>🔗 Referencias</a:t>
+            </a:r>
+          </a:p>
+        </p:txBody>
+      </p:sp>
+      <p:sp>
+        <p:nvSpPr>
+          <p:cNvPr id="3" name="TextBox 2"/>
+          <p:cNvSpPr txBox="1"/>
+          <p:nvPr/>
+        </p:nvSpPr>
+        <p:spPr>
+          <a:xfrm>
+            <a:off x="457200" y="1280160"/>
+            <a:ext cx="8229600" cy="4937760"/>
+          </a:xfrm>
+          <a:prstGeom prst="rect">
+            <a:avLst/>
+          </a:prstGeom>
+          <a:noFill/>
+        </p:spPr>
+        <p:txBody>
+          <a:bodyPr wrap="square">
+            <a:spAutoFit/>
+          </a:bodyPr>
+          <a:lstStyle/>
+          <a:p>
+            <a:pPr>
+              <a:spcAft>
+                <a:spcPts val="600"/>
+              </a:spcAft>
+            </a:pPr>
+            <a:r>
+              <a:rPr sz="1500">
+                <a:solidFill>
+                  <a:srgbClr val="22282E"/>
+                </a:solidFill>
+              </a:rPr>
               <a:t>•  Stuttard &amp; Pinto, The Web Application Hacker's Handbook, cap. 7.</a:t>
             </a:r>
           </a:p>
@@ -3599,6 +3870,81 @@
           </a:p>
         </p:txBody>
       </p:sp>
+    </p:spTree>
+  </p:cSld>
+  <p:clrMapOvr>
+    <a:masterClrMapping/>
+  </p:clrMapOvr>
+</p:sld>
+</file>
+
+<file path=ppt/slides/slide15.xml><?xml version="1.0" encoding="utf-8"?>
+<p:sld xmlns:a="http://schemas.openxmlformats.org/drawingml/2006/main" xmlns:p="http://schemas.openxmlformats.org/presentationml/2006/main" xmlns:r="http://schemas.openxmlformats.org/officeDocument/2006/relationships">
+  <p:cSld>
+    <p:spTree>
+      <p:nvGrpSpPr>
+        <p:cNvPr id="1" name=""/>
+        <p:cNvGrpSpPr/>
+        <p:nvPr/>
+      </p:nvGrpSpPr>
+      <p:grpSpPr/>
+      <p:sp>
+        <p:nvSpPr>
+          <p:cNvPr id="2" name="TextBox 1"/>
+          <p:cNvSpPr txBox="1"/>
+          <p:nvPr/>
+        </p:nvSpPr>
+        <p:spPr>
+          <a:xfrm>
+            <a:off x="457200" y="274320"/>
+            <a:ext cx="8229600" cy="640080"/>
+          </a:xfrm>
+          <a:prstGeom prst="rect">
+            <a:avLst/>
+          </a:prstGeom>
+          <a:noFill/>
+        </p:spPr>
+        <p:txBody>
+          <a:bodyPr wrap="square">
+            <a:spAutoFit/>
+          </a:bodyPr>
+          <a:lstStyle/>
+          <a:p>
+            <a:r>
+              <a:rPr sz="2200" b="1">
+                <a:solidFill>
+                  <a:srgbClr val="0B3D2E"/>
+                </a:solidFill>
+              </a:rPr>
+              <a:t>Diagrama de la clase</a:t>
+            </a:r>
+          </a:p>
+        </p:txBody>
+      </p:sp>
+      <p:pic>
+        <p:nvPicPr>
+          <p:cNvPr id="3" name="Picture 2" descr="39994a8a6fdae196.png"/>
+          <p:cNvPicPr>
+            <a:picLocks noChangeAspect="1"/>
+          </p:cNvPicPr>
+          <p:nvPr/>
+        </p:nvPicPr>
+        <p:blipFill>
+          <a:blip r:embed="rId2"/>
+          <a:stretch>
+            <a:fillRect/>
+          </a:stretch>
+        </p:blipFill>
+        <p:spPr>
+          <a:xfrm>
+            <a:off x="1464469" y="1097280"/>
+            <a:ext cx="6215062" cy="5303520"/>
+          </a:xfrm>
+          <a:prstGeom prst="rect">
+            <a:avLst/>
+          </a:prstGeom>
+        </p:spPr>
+      </p:pic>
     </p:spTree>
   </p:cSld>
   <p:clrMapOvr>
@@ -3683,7 +4029,7 @@
                   <a:srgbClr val="22282E"/>
                 </a:solidFill>
               </a:rPr>
-              <a:t>•  Analizar cómo las aplicaciones mantienen el estado de sesión tras el login y los ataques que lo comprometen: predicción y fijación de sesión, gestión insegura de cookies y fallos de logout. Una sesión mal gestionada anula toda la seguridad de una autenticación fuerte.</a:t>
+              <a:t>•  Analizar cómo las aplicaciones mantienen el estado de sesión tras el login y los ataques que lo comprometen: predicción y fijación de sesión, gestión insegura de cookies y fallos de logout. Una…</a:t>
             </a:r>
           </a:p>
         </p:txBody>
@@ -4077,7 +4423,7 @@
                   <a:srgbClr val="0B3D2E"/>
                 </a:solidFill>
               </a:rPr>
-              <a:t>📖 Definiciones y características</a:t>
+              <a:t>🧠 Explicación en profundidad</a:t>
             </a:r>
           </a:p>
         </p:txBody>
@@ -4115,82 +4461,97 @@
                   <a:srgbClr val="22282E"/>
                 </a:solidFill>
               </a:rPr>
-              <a:t>•  Session ID: identificador que liga peticiones a una sesión autenticada. Característica: debe ser largo, aleatorio e impredecible.</a:t>
-            </a:r>
-          </a:p>
-          <a:p>
-            <a:pPr>
-              <a:spcAft>
-                <a:spcPts val="600"/>
-              </a:spcAft>
-            </a:pPr>
-            <a:r>
-              <a:rPr sz="1500">
-                <a:solidFill>
-                  <a:srgbClr val="22282E"/>
-                </a:solidFill>
-              </a:rPr>
-              <a:t>•  Session fixation: forzar a la víctima a usar un ID que el atacante conoce. Característica: se evita rotando el ID tras el login.</a:t>
-            </a:r>
-          </a:p>
-          <a:p>
-            <a:pPr>
-              <a:spcAft>
-                <a:spcPts val="600"/>
-              </a:spcAft>
-            </a:pPr>
-            <a:r>
-              <a:rPr sz="1500">
-                <a:solidFill>
-                  <a:srgbClr val="22282E"/>
-                </a:solidFill>
-              </a:rPr>
-              <a:t>•  HttpOnly: impide el acceso a la cookie desde JS. Característica: mitiga el robo vía XSS.</a:t>
-            </a:r>
-          </a:p>
-          <a:p>
-            <a:pPr>
-              <a:spcAft>
-                <a:spcPts val="600"/>
-              </a:spcAft>
-            </a:pPr>
-            <a:r>
-              <a:rPr sz="1500">
-                <a:solidFill>
-                  <a:srgbClr val="22282E"/>
-                </a:solidFill>
-              </a:rPr>
-              <a:t>•  Secure: la cookie solo viaja por HTTPS. Característica: evita interceptación en claro.</a:t>
-            </a:r>
-          </a:p>
-          <a:p>
-            <a:pPr>
-              <a:spcAft>
-                <a:spcPts val="600"/>
-              </a:spcAft>
-            </a:pPr>
-            <a:r>
-              <a:rPr sz="1500">
-                <a:solidFill>
-                  <a:srgbClr val="22282E"/>
-                </a:solidFill>
-              </a:rPr>
-              <a:t>•  SameSite: limita el envío entre sitios. Característica: mitiga CSRF.</a:t>
-            </a:r>
-          </a:p>
-          <a:p>
-            <a:pPr>
-              <a:spcAft>
-                <a:spcPts val="600"/>
-              </a:spcAft>
-            </a:pPr>
-            <a:r>
-              <a:rPr sz="1500">
-                <a:solidFill>
-                  <a:srgbClr val="22282E"/>
-                </a:solidFill>
-              </a:rPr>
-              <a:t>•  Invalidez en logout: el servidor descarta la sesión al cerrar. Característica: si falta, el token sigue válido.</a:t>
+              <a:t>•  HTTP es sin estado: cada petición es independiente y el servidor no recuerda que te</a:t>
+            </a:r>
+          </a:p>
+          <a:p>
+            <a:pPr>
+              <a:spcAft>
+                <a:spcPts val="600"/>
+              </a:spcAft>
+            </a:pPr>
+            <a:r>
+              <a:rPr sz="1500">
+                <a:solidFill>
+                  <a:srgbClr val="22282E"/>
+                </a:solidFill>
+              </a:rPr>
+              <a:t>•  autenticaste hace un momento. La sesión es el mecanismo que resuelve eso: tras el login, el</a:t>
+            </a:r>
+          </a:p>
+          <a:p>
+            <a:pPr>
+              <a:spcAft>
+                <a:spcPts val="600"/>
+              </a:spcAft>
+            </a:pPr>
+            <a:r>
+              <a:rPr sz="1500">
+                <a:solidFill>
+                  <a:srgbClr val="22282E"/>
+                </a:solidFill>
+              </a:rPr>
+              <a:t>•  servidor genera un identificador de sesión (session ID) y se lo da al navegador —normalmente en</a:t>
+            </a:r>
+          </a:p>
+          <a:p>
+            <a:pPr>
+              <a:spcAft>
+                <a:spcPts val="600"/>
+              </a:spcAft>
+            </a:pPr>
+            <a:r>
+              <a:rPr sz="1500">
+                <a:solidFill>
+                  <a:srgbClr val="22282E"/>
+                </a:solidFill>
+              </a:rPr>
+              <a:t>•  una cookie—, y el navegador lo reenvía en cada petición, de modo que el servidor sabe quién eres</a:t>
+            </a:r>
+          </a:p>
+          <a:p>
+            <a:pPr>
+              <a:spcAft>
+                <a:spcPts val="600"/>
+              </a:spcAft>
+            </a:pPr>
+            <a:r>
+              <a:rPr sz="1500">
+                <a:solidFill>
+                  <a:srgbClr val="22282E"/>
+                </a:solidFill>
+              </a:rPr>
+              <a:t>•  sin pedirte la contraseña otra vez. La consecuencia de seguridad es enorme y hay que interiorizarla:</a:t>
+            </a:r>
+          </a:p>
+          <a:p>
+            <a:pPr>
+              <a:spcAft>
+                <a:spcPts val="600"/>
+              </a:spcAft>
+            </a:pPr>
+            <a:r>
+              <a:rPr sz="1500">
+                <a:solidFill>
+                  <a:srgbClr val="22282E"/>
+                </a:solidFill>
+              </a:rPr>
+              <a:t>•  ese identificador es, funcionalmente, tu contraseña durante toda la sesión. Quien lo obtenga es</a:t>
+            </a:r>
+          </a:p>
+          <a:p>
+            <a:pPr>
+              <a:spcAft>
+                <a:spcPts val="600"/>
+              </a:spcAft>
+            </a:pPr>
+            <a:r>
+              <a:rPr sz="1500">
+                <a:solidFill>
+                  <a:srgbClr val="22282E"/>
+                </a:solidFill>
+              </a:rPr>
+              <a:t>•  tú, sin saber tu clave. Por eso todo el tema gira en torno a proteger ese valor.</a:t>
             </a:r>
           </a:p>
         </p:txBody>
@@ -4241,7 +4602,7 @@
                   <a:srgbClr val="0B3D2E"/>
                 </a:solidFill>
               </a:rPr>
-              <a:t>🧰 Herramientas y preparación</a:t>
+              <a:t>📖 Definiciones y características</a:t>
             </a:r>
           </a:p>
         </p:txBody>
@@ -4279,37 +4640,82 @@
                   <a:srgbClr val="22282E"/>
                 </a:solidFill>
               </a:rPr>
-              <a:t>•  Burp (Sequencer para analizar aleatoriedad de tokens).</a:t>
-            </a:r>
-          </a:p>
-          <a:p>
-            <a:pPr>
-              <a:spcAft>
-                <a:spcPts val="600"/>
-              </a:spcAft>
-            </a:pPr>
-            <a:r>
-              <a:rPr sz="1500">
-                <a:solidFill>
-                  <a:srgbClr val="22282E"/>
-                </a:solidFill>
-              </a:rPr>
-              <a:t>•  PortSwigger labs y DVWA.</a:t>
-            </a:r>
-          </a:p>
-          <a:p>
-            <a:pPr>
-              <a:spcAft>
-                <a:spcPts val="600"/>
-              </a:spcAft>
-            </a:pPr>
-            <a:r>
-              <a:rPr sz="1500">
-                <a:solidFill>
-                  <a:srgbClr val="22282E"/>
-                </a:solidFill>
-              </a:rPr>
-              <a:t>•  DevTools para inspeccionar cookies y atributos.</a:t>
+              <a:t>•  Session ID: identificador que liga peticiones a una sesión autenticada. Característica: debe ser largo, aleatorio e impredecible.</a:t>
+            </a:r>
+          </a:p>
+          <a:p>
+            <a:pPr>
+              <a:spcAft>
+                <a:spcPts val="600"/>
+              </a:spcAft>
+            </a:pPr>
+            <a:r>
+              <a:rPr sz="1500">
+                <a:solidFill>
+                  <a:srgbClr val="22282E"/>
+                </a:solidFill>
+              </a:rPr>
+              <a:t>•  Session fixation: forzar a la víctima a usar un ID que el atacante conoce. Característica: se evita rotando el ID tras el login.</a:t>
+            </a:r>
+          </a:p>
+          <a:p>
+            <a:pPr>
+              <a:spcAft>
+                <a:spcPts val="600"/>
+              </a:spcAft>
+            </a:pPr>
+            <a:r>
+              <a:rPr sz="1500">
+                <a:solidFill>
+                  <a:srgbClr val="22282E"/>
+                </a:solidFill>
+              </a:rPr>
+              <a:t>•  HttpOnly: impide el acceso a la cookie desde JS. Característica: mitiga el robo vía XSS.</a:t>
+            </a:r>
+          </a:p>
+          <a:p>
+            <a:pPr>
+              <a:spcAft>
+                <a:spcPts val="600"/>
+              </a:spcAft>
+            </a:pPr>
+            <a:r>
+              <a:rPr sz="1500">
+                <a:solidFill>
+                  <a:srgbClr val="22282E"/>
+                </a:solidFill>
+              </a:rPr>
+              <a:t>•  Secure: la cookie solo viaja por HTTPS. Característica: evita interceptación en claro.</a:t>
+            </a:r>
+          </a:p>
+          <a:p>
+            <a:pPr>
+              <a:spcAft>
+                <a:spcPts val="600"/>
+              </a:spcAft>
+            </a:pPr>
+            <a:r>
+              <a:rPr sz="1500">
+                <a:solidFill>
+                  <a:srgbClr val="22282E"/>
+                </a:solidFill>
+              </a:rPr>
+              <a:t>•  SameSite: limita el envío entre sitios. Característica: mitiga CSRF.</a:t>
+            </a:r>
+          </a:p>
+          <a:p>
+            <a:pPr>
+              <a:spcAft>
+                <a:spcPts val="600"/>
+              </a:spcAft>
+            </a:pPr>
+            <a:r>
+              <a:rPr sz="1500">
+                <a:solidFill>
+                  <a:srgbClr val="22282E"/>
+                </a:solidFill>
+              </a:rPr>
+              <a:t>•  Invalidez en logout: el servidor descarta la sesión al cerrar. Característica: si falta, el token sigue válido.</a:t>
             </a:r>
           </a:p>
         </p:txBody>
@@ -4360,7 +4766,7 @@
                   <a:srgbClr val="0B3D2E"/>
                 </a:solidFill>
               </a:rPr>
-              <a:t>🧪 Laboratorio guiado</a:t>
+              <a:t>📔 Glosario</a:t>
             </a:r>
           </a:p>
         </p:txBody>
@@ -4398,97 +4804,97 @@
                   <a:srgbClr val="22282E"/>
                 </a:solidFill>
               </a:rPr>
-              <a:t>•  Inicia sesión y captura el session ID; inspecciona sus atributos en DevTools.</a:t>
-            </a:r>
-          </a:p>
-          <a:p>
-            <a:pPr>
-              <a:spcAft>
-                <a:spcPts val="600"/>
-              </a:spcAft>
-            </a:pPr>
-            <a:r>
-              <a:rPr sz="1500">
-                <a:solidFill>
-                  <a:srgbClr val="22282E"/>
-                </a:solidFill>
-              </a:rPr>
-              <a:t>•  Recolecta muchos tokens y analiza su aleatoriedad con Burp Sequencer.</a:t>
-            </a:r>
-          </a:p>
-          <a:p>
-            <a:pPr>
-              <a:spcAft>
-                <a:spcPts val="600"/>
-              </a:spcAft>
-            </a:pPr>
-            <a:r>
-              <a:rPr sz="1500">
-                <a:solidFill>
-                  <a:srgbClr val="22282E"/>
-                </a:solidFill>
-              </a:rPr>
-              <a:t>•  Comprueba si el ID rota tras el login (defensa contra fixation). Si no, es explotable.</a:t>
-            </a:r>
-          </a:p>
-          <a:p>
-            <a:pPr>
-              <a:spcAft>
-                <a:spcPts val="600"/>
-              </a:spcAft>
-            </a:pPr>
-            <a:r>
-              <a:rPr sz="1500">
-                <a:solidFill>
-                  <a:srgbClr val="22282E"/>
-                </a:solidFill>
-              </a:rPr>
-              <a:t>•  Simula session fixation: fija un ID antes del login de la víctima y verifica si se mantiene.</a:t>
-            </a:r>
-          </a:p>
-          <a:p>
-            <a:pPr>
-              <a:spcAft>
-                <a:spcPts val="600"/>
-              </a:spcAft>
-            </a:pPr>
-            <a:r>
-              <a:rPr sz="1500">
-                <a:solidFill>
-                  <a:srgbClr val="22282E"/>
-                </a:solidFill>
-              </a:rPr>
-              <a:t>•  Revisa flags: ¿HttpOnly?, ¿Secure?, ¿SameSite? Documenta los que falten.</a:t>
-            </a:r>
-          </a:p>
-          <a:p>
-            <a:pPr>
-              <a:spcAft>
-                <a:spcPts val="600"/>
-              </a:spcAft>
-            </a:pPr>
-            <a:r>
-              <a:rPr sz="1500">
-                <a:solidFill>
-                  <a:srgbClr val="22282E"/>
-                </a:solidFill>
-              </a:rPr>
-              <a:t>•  Prueba el logout: tras cerrar sesión, reutiliza el token antiguo; ¿sigue válido?</a:t>
-            </a:r>
-          </a:p>
-          <a:p>
-            <a:pPr>
-              <a:spcAft>
-                <a:spcPts val="600"/>
-              </a:spcAft>
-            </a:pPr>
-            <a:r>
-              <a:rPr sz="1500">
-                <a:solidFill>
-                  <a:srgbClr val="22282E"/>
-                </a:solidFill>
-              </a:rPr>
-              <a:t>•  Encadena con XSS (clase 097): roba la cookie si no es HttpOnly.</a:t>
+              <a:t>•  Término — Definición concisa</a:t>
+            </a:r>
+          </a:p>
+          <a:p>
+            <a:pPr>
+              <a:spcAft>
+                <a:spcPts val="600"/>
+              </a:spcAft>
+            </a:pPr>
+            <a:r>
+              <a:rPr sz="1500">
+                <a:solidFill>
+                  <a:srgbClr val="22282E"/>
+                </a:solidFill>
+              </a:rPr>
+              <a:t>•  Sesión — Mecanismo que da estado a HTTP tras el login</a:t>
+            </a:r>
+          </a:p>
+          <a:p>
+            <a:pPr>
+              <a:spcAft>
+                <a:spcPts val="600"/>
+              </a:spcAft>
+            </a:pPr>
+            <a:r>
+              <a:rPr sz="1500">
+                <a:solidFill>
+                  <a:srgbClr val="22282E"/>
+                </a:solidFill>
+              </a:rPr>
+              <a:t>•  Session ID — Identificador que equivale a la contraseña durante la sesión</a:t>
+            </a:r>
+          </a:p>
+          <a:p>
+            <a:pPr>
+              <a:spcAft>
+                <a:spcPts val="600"/>
+              </a:spcAft>
+            </a:pPr>
+            <a:r>
+              <a:rPr sz="1500">
+                <a:solidFill>
+                  <a:srgbClr val="22282E"/>
+                </a:solidFill>
+              </a:rPr>
+              <a:t>•  Cookie — Portador habitual del session ID</a:t>
+            </a:r>
+          </a:p>
+          <a:p>
+            <a:pPr>
+              <a:spcAft>
+                <a:spcPts val="600"/>
+              </a:spcAft>
+            </a:pPr>
+            <a:r>
+              <a:rPr sz="1500">
+                <a:solidFill>
+                  <a:srgbClr val="22282E"/>
+                </a:solidFill>
+              </a:rPr>
+              <a:t>•  Entropía del ID — Longitud y aleatoriedad; impide adivinarlo</a:t>
+            </a:r>
+          </a:p>
+          <a:p>
+            <a:pPr>
+              <a:spcAft>
+                <a:spcPts val="600"/>
+              </a:spcAft>
+            </a:pPr>
+            <a:r>
+              <a:rPr sz="1500">
+                <a:solidFill>
+                  <a:srgbClr val="22282E"/>
+                </a:solidFill>
+              </a:rPr>
+              <a:t>•  CSPRNG — Generador seguro con el que debe crearse el ID</a:t>
+            </a:r>
+          </a:p>
+          <a:p>
+            <a:pPr>
+              <a:spcAft>
+                <a:spcPts val="600"/>
+              </a:spcAft>
+            </a:pPr>
+            <a:r>
+              <a:rPr sz="1500">
+                <a:solidFill>
+                  <a:srgbClr val="22282E"/>
+                </a:solidFill>
+              </a:rPr>
+              <a:t>•  HttpOnly — Flag que oculta la cookie a JavaScript; mitiga el robo por XSS</a:t>
             </a:r>
           </a:p>
         </p:txBody>
@@ -4539,7 +4945,7 @@
                   <a:srgbClr val="0B3D2E"/>
                 </a:solidFill>
               </a:rPr>
-              <a:t>✍️ Ejercicios</a:t>
+              <a:t>🧰 Herramientas y preparación</a:t>
             </a:r>
           </a:p>
         </p:txBody>
@@ -4577,82 +4983,37 @@
                   <a:srgbClr val="22282E"/>
                 </a:solidFill>
               </a:rPr>
-              <a:t>•  Evalúa la entropía de un token con Sequencer y explica el resultado.</a:t>
-            </a:r>
-          </a:p>
-          <a:p>
-            <a:pPr>
-              <a:spcAft>
-                <a:spcPts val="600"/>
-              </a:spcAft>
-            </a:pPr>
-            <a:r>
-              <a:rPr sz="1500">
-                <a:solidFill>
-                  <a:srgbClr val="22282E"/>
-                </a:solidFill>
-              </a:rPr>
-              <a:t>•  Reproduce una session fixation en un lab que no rote el ID.</a:t>
-            </a:r>
-          </a:p>
-          <a:p>
-            <a:pPr>
-              <a:spcAft>
-                <a:spcPts val="600"/>
-              </a:spcAft>
-            </a:pPr>
-            <a:r>
-              <a:rPr sz="1500">
-                <a:solidFill>
-                  <a:srgbClr val="22282E"/>
-                </a:solidFill>
-              </a:rPr>
-              <a:t>•  Enumera los atributos de cookie y qué protege cada uno.</a:t>
-            </a:r>
-          </a:p>
-          <a:p>
-            <a:pPr>
-              <a:spcAft>
-                <a:spcPts val="600"/>
-              </a:spcAft>
-            </a:pPr>
-            <a:r>
-              <a:rPr sz="1500">
-                <a:solidFill>
-                  <a:srgbClr val="22282E"/>
-                </a:solidFill>
-              </a:rPr>
-              <a:t>•  Comprueba si la sesión expira por inactividad y por tiempo absoluto.</a:t>
-            </a:r>
-          </a:p>
-          <a:p>
-            <a:pPr>
-              <a:spcAft>
-                <a:spcPts val="600"/>
-              </a:spcAft>
-            </a:pPr>
-            <a:r>
-              <a:rPr sz="1500">
-                <a:solidFill>
-                  <a:srgbClr val="22282E"/>
-                </a:solidFill>
-              </a:rPr>
-              <a:t>•  Explica por qué el logout debe invalidar en servidor, no solo borrar la cookie.</a:t>
-            </a:r>
-          </a:p>
-          <a:p>
-            <a:pPr>
-              <a:spcAft>
-                <a:spcPts val="600"/>
-              </a:spcAft>
-            </a:pPr>
-            <a:r>
-              <a:rPr sz="1500">
-                <a:solidFill>
-                  <a:srgbClr val="22282E"/>
-                </a:solidFill>
-              </a:rPr>
-              <a:t>•  Diseña la configuración de cookie ideal para una app bancaria.</a:t>
+              <a:t>•  Burp (Sequencer para analizar aleatoriedad de tokens).</a:t>
+            </a:r>
+          </a:p>
+          <a:p>
+            <a:pPr>
+              <a:spcAft>
+                <a:spcPts val="600"/>
+              </a:spcAft>
+            </a:pPr>
+            <a:r>
+              <a:rPr sz="1500">
+                <a:solidFill>
+                  <a:srgbClr val="22282E"/>
+                </a:solidFill>
+              </a:rPr>
+              <a:t>•  PortSwigger labs y DVWA.</a:t>
+            </a:r>
+          </a:p>
+          <a:p>
+            <a:pPr>
+              <a:spcAft>
+                <a:spcPts val="600"/>
+              </a:spcAft>
+            </a:pPr>
+            <a:r>
+              <a:rPr sz="1500">
+                <a:solidFill>
+                  <a:srgbClr val="22282E"/>
+                </a:solidFill>
+              </a:rPr>
+              <a:t>•  DevTools para inspeccionar cookies y atributos.</a:t>
             </a:r>
           </a:p>
         </p:txBody>
@@ -4703,7 +5064,7 @@
                   <a:srgbClr val="0B3D2E"/>
                 </a:solidFill>
               </a:rPr>
-              <a:t>📝 Reto verificable</a:t>
+              <a:t>🧪 Laboratorio guiado</a:t>
             </a:r>
           </a:p>
         </p:txBody>
@@ -4741,22 +5102,97 @@
                   <a:srgbClr val="22282E"/>
                 </a:solidFill>
               </a:rPr>
-              <a:t>•  Demuestra un fallo de gestión de sesión en un lab: session fixation o token válido tras logout, y propón la corrección.</a:t>
-            </a:r>
-          </a:p>
-          <a:p>
-            <a:pPr>
-              <a:spcAft>
-                <a:spcPts val="600"/>
-              </a:spcAft>
-            </a:pPr>
-            <a:r>
-              <a:rPr sz="1500">
-                <a:solidFill>
-                  <a:srgbClr val="22282E"/>
-                </a:solidFill>
-              </a:rPr>
-              <a:t>•  Criterio de aceptación: reproduces el fallo con evidencia (mismo token antes/después o reuso tras logout) y describes la defensa concreta (rotación en login, invalidación en servidor).</a:t>
+              <a:t>•  Inicia sesión y captura el session ID; inspecciona sus atributos en DevTools.</a:t>
+            </a:r>
+          </a:p>
+          <a:p>
+            <a:pPr>
+              <a:spcAft>
+                <a:spcPts val="600"/>
+              </a:spcAft>
+            </a:pPr>
+            <a:r>
+              <a:rPr sz="1500">
+                <a:solidFill>
+                  <a:srgbClr val="22282E"/>
+                </a:solidFill>
+              </a:rPr>
+              <a:t>•  Recolecta muchos tokens y analiza su aleatoriedad con Burp Sequencer.</a:t>
+            </a:r>
+          </a:p>
+          <a:p>
+            <a:pPr>
+              <a:spcAft>
+                <a:spcPts val="600"/>
+              </a:spcAft>
+            </a:pPr>
+            <a:r>
+              <a:rPr sz="1500">
+                <a:solidFill>
+                  <a:srgbClr val="22282E"/>
+                </a:solidFill>
+              </a:rPr>
+              <a:t>•  Comprueba si el ID rota tras el login (defensa contra fixation). Si no, es explotable.</a:t>
+            </a:r>
+          </a:p>
+          <a:p>
+            <a:pPr>
+              <a:spcAft>
+                <a:spcPts val="600"/>
+              </a:spcAft>
+            </a:pPr>
+            <a:r>
+              <a:rPr sz="1500">
+                <a:solidFill>
+                  <a:srgbClr val="22282E"/>
+                </a:solidFill>
+              </a:rPr>
+              <a:t>•  Simula session fixation: fija un ID antes del login de la víctima y verifica si se mantiene.</a:t>
+            </a:r>
+          </a:p>
+          <a:p>
+            <a:pPr>
+              <a:spcAft>
+                <a:spcPts val="600"/>
+              </a:spcAft>
+            </a:pPr>
+            <a:r>
+              <a:rPr sz="1500">
+                <a:solidFill>
+                  <a:srgbClr val="22282E"/>
+                </a:solidFill>
+              </a:rPr>
+              <a:t>•  Revisa flags: ¿HttpOnly?, ¿Secure?, ¿SameSite? Documenta los que falten.</a:t>
+            </a:r>
+          </a:p>
+          <a:p>
+            <a:pPr>
+              <a:spcAft>
+                <a:spcPts val="600"/>
+              </a:spcAft>
+            </a:pPr>
+            <a:r>
+              <a:rPr sz="1500">
+                <a:solidFill>
+                  <a:srgbClr val="22282E"/>
+                </a:solidFill>
+              </a:rPr>
+              <a:t>•  Prueba el logout: tras cerrar sesión, reutiliza el token antiguo; ¿sigue válido?</a:t>
+            </a:r>
+          </a:p>
+          <a:p>
+            <a:pPr>
+              <a:spcAft>
+                <a:spcPts val="600"/>
+              </a:spcAft>
+            </a:pPr>
+            <a:r>
+              <a:rPr sz="1500">
+                <a:solidFill>
+                  <a:srgbClr val="22282E"/>
+                </a:solidFill>
+              </a:rPr>
+              <a:t>•  Encadena con XSS (clase 097): roba la cookie si no es HttpOnly.</a:t>
             </a:r>
           </a:p>
         </p:txBody>
